--- a/docs/project_progress/img/07/07_figures.pptx
+++ b/docs/project_progress/img/07/07_figures.pptx
@@ -3299,8 +3299,8 @@
         </p:nvSpPr>
         <p:spPr>
           <a:xfrm>
-            <a:off x="639598" y="1199326"/>
-            <a:ext cx="1628645" cy="195549"/>
+            <a:off x="448937" y="1199326"/>
+            <a:ext cx="2009966" cy="195549"/>
           </a:xfrm>
           <a:prstGeom prst="rect">
             <a:avLst/>
@@ -3321,7 +3321,7 @@
                 </a:solidFill>
                 <a:latin typeface="Malgun Gothic"/>
               </a:rPr>
-              <a:t>① 알람 육안 확인</a:t>
+              <a:t>① 24시간 모니터 감시</a:t>
             </a:r>
           </a:p>
         </p:txBody>
@@ -3334,8 +3334,8 @@
         </p:nvSpPr>
         <p:spPr>
           <a:xfrm>
-            <a:off x="457096" y="1441857"/>
-            <a:ext cx="1993649" cy="159994"/>
+            <a:off x="219389" y="1441857"/>
+            <a:ext cx="2469062" cy="159994"/>
           </a:xfrm>
           <a:prstGeom prst="rect">
             <a:avLst/>
@@ -3356,7 +3356,7 @@
                 </a:solidFill>
                 <a:latin typeface="Malgun Gothic"/>
               </a:rPr>
-              <a:t>사람이 알람 화면을 지켜봄</a:t>
+              <a:t>RCS 화면을 사람이 교대로 지켜봄</a:t>
             </a:r>
           </a:p>
         </p:txBody>
@@ -13243,8 +13243,8 @@
         </p:nvSpPr>
         <p:spPr>
           <a:xfrm>
-            <a:off x="7304143" y="5949647"/>
-            <a:ext cx="5581532" cy="159994"/>
+            <a:off x="7207575" y="5949647"/>
+            <a:ext cx="5774669" cy="159994"/>
           </a:xfrm>
           <a:prstGeom prst="rect">
             <a:avLst/>
@@ -13265,7 +13265,7 @@
                 </a:solidFill>
                 <a:latin typeface="Malgun Gothic"/>
               </a:rPr>
-              <a:t>≈ WAFER 약 100장/주 (장당 15분) · 연 약 5,000장 · 전 건 동일 단축 가정</a:t>
+              <a:t>≈ WAFER 약 100장/주 (장당 15분) · 장비 약 0.2대 = Capex 약 4~5억 원 절감</a:t>
             </a:r>
           </a:p>
         </p:txBody>
